--- a/lab-3-agent-builder-custom-mode/v3-wireframes/website-wireframes.pptx
+++ b/lab-3-agent-builder-custom-mode/v3-wireframes/website-wireframes.pptx
@@ -4578,7 +4578,7 @@
           <a:p>
             <a:r>
               <a:rPr lang="en-US" dirty="0"/>
-              <a:t>Chat with data</a:t>
+              <a:t>Ask questions of your data</a:t>
             </a:r>
           </a:p>
         </p:txBody>
